--- a/notes/05-pointer_array.pptx
+++ b/notes/05-pointer_array.pptx
@@ -5,10 +5,10 @@
     <p:sldMasterId id="2147483684" r:id="rId1"/>
   </p:sldMasterIdLst>
   <p:notesMasterIdLst>
-    <p:notesMasterId r:id="rId38"/>
+    <p:notesMasterId r:id="rId39"/>
   </p:notesMasterIdLst>
   <p:handoutMasterIdLst>
-    <p:handoutMasterId r:id="rId39"/>
+    <p:handoutMasterId r:id="rId40"/>
   </p:handoutMasterIdLst>
   <p:sldIdLst>
     <p:sldId id="256" r:id="rId2"/>
@@ -25,28 +25,29 @@
     <p:sldId id="1154" r:id="rId13"/>
     <p:sldId id="1161" r:id="rId14"/>
     <p:sldId id="1119" r:id="rId15"/>
-    <p:sldId id="1120" r:id="rId16"/>
-    <p:sldId id="1123" r:id="rId17"/>
-    <p:sldId id="1164" r:id="rId18"/>
-    <p:sldId id="1131" r:id="rId19"/>
-    <p:sldId id="1132" r:id="rId20"/>
-    <p:sldId id="1133" r:id="rId21"/>
-    <p:sldId id="1134" r:id="rId22"/>
-    <p:sldId id="1135" r:id="rId23"/>
-    <p:sldId id="1136" r:id="rId24"/>
-    <p:sldId id="1138" r:id="rId25"/>
-    <p:sldId id="966" r:id="rId26"/>
-    <p:sldId id="1196" r:id="rId27"/>
-    <p:sldId id="1197" r:id="rId28"/>
-    <p:sldId id="1198" r:id="rId29"/>
-    <p:sldId id="1199" r:id="rId30"/>
-    <p:sldId id="1200" r:id="rId31"/>
-    <p:sldId id="1155" r:id="rId32"/>
-    <p:sldId id="1139" r:id="rId33"/>
-    <p:sldId id="1140" r:id="rId34"/>
-    <p:sldId id="1143" r:id="rId35"/>
-    <p:sldId id="1157" r:id="rId36"/>
-    <p:sldId id="1201" r:id="rId37"/>
+    <p:sldId id="1203" r:id="rId16"/>
+    <p:sldId id="1120" r:id="rId17"/>
+    <p:sldId id="1123" r:id="rId18"/>
+    <p:sldId id="1164" r:id="rId19"/>
+    <p:sldId id="1131" r:id="rId20"/>
+    <p:sldId id="1132" r:id="rId21"/>
+    <p:sldId id="1133" r:id="rId22"/>
+    <p:sldId id="1134" r:id="rId23"/>
+    <p:sldId id="1135" r:id="rId24"/>
+    <p:sldId id="1136" r:id="rId25"/>
+    <p:sldId id="1138" r:id="rId26"/>
+    <p:sldId id="966" r:id="rId27"/>
+    <p:sldId id="1196" r:id="rId28"/>
+    <p:sldId id="1197" r:id="rId29"/>
+    <p:sldId id="1198" r:id="rId30"/>
+    <p:sldId id="1199" r:id="rId31"/>
+    <p:sldId id="1200" r:id="rId32"/>
+    <p:sldId id="1155" r:id="rId33"/>
+    <p:sldId id="1139" r:id="rId34"/>
+    <p:sldId id="1140" r:id="rId35"/>
+    <p:sldId id="1143" r:id="rId36"/>
+    <p:sldId id="1157" r:id="rId37"/>
+    <p:sldId id="1201" r:id="rId38"/>
   </p:sldIdLst>
   <p:sldSz cx="9144000" cy="6858000" type="screen4x3"/>
   <p:notesSz cx="6858000" cy="9144000"/>
@@ -164,14 +165,6 @@
 </p:presentation>
 </file>
 
-<file path=ppt/revisionInfo.xml><?xml version="1.0" encoding="utf-8"?>
-<p1510:revInfo xmlns:a="http://schemas.openxmlformats.org/drawingml/2006/main" xmlns:r="http://schemas.openxmlformats.org/officeDocument/2006/relationships" xmlns:p1510="http://schemas.microsoft.com/office/powerpoint/2015/10/main">
-  <p1510:revLst>
-    <p1510:client id="{54C1F13C-0F2F-3040-A169-6772F606462C}" v="15" dt="2026-02-04T17:55:52.601"/>
-  </p1510:revLst>
-</p1510:revInfo>
-</file>
-
 <file path=ppt/handoutMasters/handoutMaster1.xml><?xml version="1.0" encoding="utf-8"?>
 <p:handoutMaster xmlns:a="http://schemas.openxmlformats.org/drawingml/2006/main" xmlns:r="http://schemas.openxmlformats.org/officeDocument/2006/relationships" xmlns:p="http://schemas.openxmlformats.org/presentationml/2006/main">
   <p:cSld>
@@ -254,7 +247,7 @@
           <a:p>
             <a:fld id="{C9615FF3-9FA2-1C4A-AAEA-4750F890D655}" type="datetimeFigureOut">
               <a:rPr lang="en-US" smtClean="0"/>
-              <a:t>2/4/26</a:t>
+              <a:t>9/23/26</a:t>
             </a:fld>
             <a:endParaRPr lang="en-US"/>
           </a:p>
@@ -420,7 +413,7 @@
           <a:p>
             <a:fld id="{52180D89-5C43-EF4A-AA48-38E879565468}" type="datetimeFigureOut">
               <a:rPr lang="en-US" smtClean="0"/>
-              <a:t>2/4/26</a:t>
+              <a:t>9/23/26</a:t>
             </a:fld>
             <a:endParaRPr lang="en-US"/>
           </a:p>
@@ -772,7 +765,7 @@
 </p:notes>
 </file>
 
-<file path=ppt/notesSlides/notesSlide2.xml><?xml version="1.0" encoding="utf-8"?>
+<file path=ppt/notesSlides/notesSlide10.xml><?xml version="1.0" encoding="utf-8"?>
 <p:notes xmlns:a="http://schemas.openxmlformats.org/drawingml/2006/main" xmlns:r="http://schemas.openxmlformats.org/officeDocument/2006/relationships" xmlns:p="http://schemas.openxmlformats.org/presentationml/2006/main">
   <p:cSld>
     <p:spTree>
@@ -791,7 +784,7 @@
       </p:grpSpPr>
       <p:sp>
         <p:nvSpPr>
-          <p:cNvPr id="2" name="Slide Image Placeholder 1"/>
+          <p:cNvPr id="2" name="幻灯片图像占位符 1"/>
           <p:cNvSpPr>
             <a:spLocks noGrp="1" noRot="1" noChangeAspect="1"/>
           </p:cNvSpPr>
@@ -803,7 +796,7 @@
       </p:sp>
       <p:sp>
         <p:nvSpPr>
-          <p:cNvPr id="3" name="Notes Placeholder 2"/>
+          <p:cNvPr id="3" name="备注占位符 2"/>
           <p:cNvSpPr>
             <a:spLocks noGrp="1"/>
           </p:cNvSpPr>
@@ -816,13 +809,121 @@
           <a:bodyPr/>
           <a:lstStyle/>
           <a:p>
+            <a:endParaRPr kumimoji="1" lang="zh-CN" altLang="en-US" dirty="0"/>
+          </a:p>
+        </p:txBody>
+      </p:sp>
+      <p:sp>
+        <p:nvSpPr>
+          <p:cNvPr id="4" name="幻灯片编号占位符 3"/>
+          <p:cNvSpPr>
+            <a:spLocks noGrp="1"/>
+          </p:cNvSpPr>
+          <p:nvPr>
+            <p:ph type="sldNum" sz="quarter" idx="10"/>
+          </p:nvPr>
+        </p:nvSpPr>
+        <p:spPr/>
+        <p:txBody>
+          <a:bodyPr/>
+          <a:lstStyle/>
+          <a:p>
+            <a:fld id="{8556610F-FCBD-844B-B814-9F48A27EB77F}" type="slidenum">
+              <a:rPr lang="en-US" smtClean="0"/>
+              <a:t>36</a:t>
+            </a:fld>
+            <a:endParaRPr lang="en-US"/>
+          </a:p>
+        </p:txBody>
+      </p:sp>
+    </p:spTree>
+    <p:extLst>
+      <p:ext uri="{BB962C8B-B14F-4D97-AF65-F5344CB8AC3E}">
+        <p14:creationId xmlns:p14="http://schemas.microsoft.com/office/powerpoint/2010/main" val="4053760974"/>
+      </p:ext>
+    </p:extLst>
+  </p:cSld>
+  <p:clrMapOvr>
+    <a:masterClrMapping/>
+  </p:clrMapOvr>
+</p:notes>
+</file>
+
+<file path=ppt/notesSlides/notesSlide2.xml><?xml version="1.0" encoding="utf-8"?>
+<p:notes xmlns:a="http://schemas.openxmlformats.org/drawingml/2006/main" xmlns:r="http://schemas.openxmlformats.org/officeDocument/2006/relationships" xmlns:p="http://schemas.openxmlformats.org/presentationml/2006/main">
+  <p:cSld>
+    <p:spTree>
+      <p:nvGrpSpPr>
+        <p:cNvPr id="1" name="">
+          <a:extLst>
+            <a:ext uri="{FF2B5EF4-FFF2-40B4-BE49-F238E27FC236}">
+              <a16:creationId xmlns:a16="http://schemas.microsoft.com/office/drawing/2014/main" id="{C5D74D2F-0B5C-29EE-5BA7-BD5FBFE1D101}"/>
+            </a:ext>
+          </a:extLst>
+        </p:cNvPr>
+        <p:cNvGrpSpPr/>
+        <p:nvPr/>
+      </p:nvGrpSpPr>
+      <p:grpSpPr>
+        <a:xfrm>
+          <a:off x="0" y="0"/>
+          <a:ext cx="0" cy="0"/>
+          <a:chOff x="0" y="0"/>
+          <a:chExt cx="0" cy="0"/>
+        </a:xfrm>
+      </p:grpSpPr>
+      <p:sp>
+        <p:nvSpPr>
+          <p:cNvPr id="2" name="Slide Image Placeholder 1">
+            <a:extLst>
+              <a:ext uri="{FF2B5EF4-FFF2-40B4-BE49-F238E27FC236}">
+                <a16:creationId xmlns:a16="http://schemas.microsoft.com/office/drawing/2014/main" id="{04943531-5C99-3F86-4CE9-247929C03F81}"/>
+              </a:ext>
+            </a:extLst>
+          </p:cNvPr>
+          <p:cNvSpPr>
+            <a:spLocks noGrp="1" noRot="1" noChangeAspect="1"/>
+          </p:cNvSpPr>
+          <p:nvPr>
+            <p:ph type="sldImg"/>
+          </p:nvPr>
+        </p:nvSpPr>
+        <p:spPr/>
+      </p:sp>
+      <p:sp>
+        <p:nvSpPr>
+          <p:cNvPr id="3" name="Notes Placeholder 2">
+            <a:extLst>
+              <a:ext uri="{FF2B5EF4-FFF2-40B4-BE49-F238E27FC236}">
+                <a16:creationId xmlns:a16="http://schemas.microsoft.com/office/drawing/2014/main" id="{16B5671B-8EBB-1839-0BDA-804C6183A9D4}"/>
+              </a:ext>
+            </a:extLst>
+          </p:cNvPr>
+          <p:cNvSpPr>
+            <a:spLocks noGrp="1"/>
+          </p:cNvSpPr>
+          <p:nvPr>
+            <p:ph type="body" idx="1"/>
+          </p:nvPr>
+        </p:nvSpPr>
+        <p:spPr/>
+        <p:txBody>
+          <a:bodyPr/>
+          <a:lstStyle/>
+          <a:p>
             <a:endParaRPr lang="en-US" dirty="0"/>
           </a:p>
         </p:txBody>
       </p:sp>
       <p:sp>
         <p:nvSpPr>
-          <p:cNvPr id="4" name="Slide Number Placeholder 3"/>
+          <p:cNvPr id="4" name="Slide Number Placeholder 3">
+            <a:extLst>
+              <a:ext uri="{FF2B5EF4-FFF2-40B4-BE49-F238E27FC236}">
+                <a16:creationId xmlns:a16="http://schemas.microsoft.com/office/drawing/2014/main" id="{B6C6EEA2-F23A-5609-7DDB-D9B9D1D24006}"/>
+              </a:ext>
+            </a:extLst>
+          </p:cNvPr>
           <p:cNvSpPr>
             <a:spLocks noGrp="1"/>
           </p:cNvSpPr>
@@ -846,7 +947,7 @@
     </p:spTree>
     <p:extLst>
       <p:ext uri="{BB962C8B-B14F-4D97-AF65-F5344CB8AC3E}">
-        <p14:creationId xmlns:p14="http://schemas.microsoft.com/office/powerpoint/2010/main" val="3537950556"/>
+        <p14:creationId xmlns:p14="http://schemas.microsoft.com/office/powerpoint/2010/main" val="1116909304"/>
       </p:ext>
     </p:extLst>
   </p:cSld>
@@ -911,7 +1012,7 @@
             <a:spLocks noGrp="1"/>
           </p:cNvSpPr>
           <p:nvPr>
-            <p:ph type="sldNum" sz="quarter" idx="10"/>
+            <p:ph type="sldNum" sz="quarter" idx="5"/>
           </p:nvPr>
         </p:nvSpPr>
         <p:spPr/>
@@ -921,7 +1022,7 @@
           <a:p>
             <a:fld id="{8556610F-FCBD-844B-B814-9F48A27EB77F}" type="slidenum">
               <a:rPr lang="en-US" smtClean="0"/>
-              <a:t>18</a:t>
+              <a:t>16</a:t>
             </a:fld>
             <a:endParaRPr lang="en-US"/>
           </a:p>
@@ -930,7 +1031,7 @@
     </p:spTree>
     <p:extLst>
       <p:ext uri="{BB962C8B-B14F-4D97-AF65-F5344CB8AC3E}">
-        <p14:creationId xmlns:p14="http://schemas.microsoft.com/office/powerpoint/2010/main" val="3717206954"/>
+        <p14:creationId xmlns:p14="http://schemas.microsoft.com/office/powerpoint/2010/main" val="3537950556"/>
       </p:ext>
     </p:extLst>
   </p:cSld>
@@ -1379,7 +1480,7 @@
       </p:grpSpPr>
       <p:sp>
         <p:nvSpPr>
-          <p:cNvPr id="2" name="幻灯片图像占位符 1"/>
+          <p:cNvPr id="2" name="Slide Image Placeholder 1"/>
           <p:cNvSpPr>
             <a:spLocks noGrp="1" noRot="1" noChangeAspect="1"/>
           </p:cNvSpPr>
@@ -1391,7 +1492,7 @@
       </p:sp>
       <p:sp>
         <p:nvSpPr>
-          <p:cNvPr id="3" name="备注占位符 2"/>
+          <p:cNvPr id="3" name="Notes Placeholder 2"/>
           <p:cNvSpPr>
             <a:spLocks noGrp="1"/>
           </p:cNvSpPr>
@@ -1404,13 +1505,13 @@
           <a:bodyPr/>
           <a:lstStyle/>
           <a:p>
-            <a:endParaRPr kumimoji="1" lang="zh-CN" altLang="en-US" dirty="0"/>
-          </a:p>
-        </p:txBody>
-      </p:sp>
-      <p:sp>
-        <p:nvSpPr>
-          <p:cNvPr id="4" name="幻灯片编号占位符 3"/>
+            <a:endParaRPr lang="en-US" dirty="0"/>
+          </a:p>
+        </p:txBody>
+      </p:sp>
+      <p:sp>
+        <p:nvSpPr>
+          <p:cNvPr id="4" name="Slide Number Placeholder 3"/>
           <p:cNvSpPr>
             <a:spLocks noGrp="1"/>
           </p:cNvSpPr>
@@ -1425,7 +1526,7 @@
           <a:p>
             <a:fld id="{8556610F-FCBD-844B-B814-9F48A27EB77F}" type="slidenum">
               <a:rPr lang="en-US" smtClean="0"/>
-              <a:t>35</a:t>
+              <a:t>24</a:t>
             </a:fld>
             <a:endParaRPr lang="en-US"/>
           </a:p>
@@ -1434,7 +1535,7 @@
     </p:spTree>
     <p:extLst>
       <p:ext uri="{BB962C8B-B14F-4D97-AF65-F5344CB8AC3E}">
-        <p14:creationId xmlns:p14="http://schemas.microsoft.com/office/powerpoint/2010/main" val="4053760974"/>
+        <p14:creationId xmlns:p14="http://schemas.microsoft.com/office/powerpoint/2010/main" val="3717206954"/>
       </p:ext>
     </p:extLst>
   </p:cSld>
@@ -1623,7 +1724,7 @@
           <a:p>
             <a:fld id="{212D147F-079F-4846-994D-0DB4A1A045D4}" type="datetime1">
               <a:rPr lang="zh-CN" altLang="en-US" smtClean="0"/>
-              <a:t>2026/2/4</a:t>
+              <a:t>2026/9/23</a:t>
             </a:fld>
             <a:endParaRPr lang="en-US"/>
           </a:p>
@@ -1787,7 +1888,7 @@
           <a:p>
             <a:fld id="{17491736-879B-FE48-95EC-EDE8A01D99DB}" type="datetime1">
               <a:rPr lang="zh-CN" altLang="en-US" smtClean="0"/>
-              <a:t>2026/2/4</a:t>
+              <a:t>2026/9/23</a:t>
             </a:fld>
             <a:endParaRPr lang="en-US"/>
           </a:p>
@@ -1961,7 +2062,7 @@
           <a:p>
             <a:fld id="{B977160F-44E5-DA43-A440-B77513F80BF6}" type="datetime1">
               <a:rPr lang="zh-CN" altLang="en-US" smtClean="0"/>
-              <a:t>2026/2/4</a:t>
+              <a:t>2026/9/23</a:t>
             </a:fld>
             <a:endParaRPr lang="en-US"/>
           </a:p>
@@ -2133,7 +2234,7 @@
           <a:p>
             <a:fld id="{AE880671-2720-6742-BF3B-130F38BFD6C2}" type="datetime1">
               <a:rPr lang="zh-CN" altLang="en-US" smtClean="0"/>
-              <a:t>2026/2/4</a:t>
+              <a:t>2026/9/23</a:t>
             </a:fld>
             <a:endParaRPr lang="en-US"/>
           </a:p>
@@ -2378,7 +2479,7 @@
           <a:p>
             <a:fld id="{0C2FF912-C460-F747-A5A7-E580342BDBD8}" type="datetime1">
               <a:rPr lang="zh-CN" altLang="en-US" smtClean="0"/>
-              <a:t>2026/2/4</a:t>
+              <a:t>2026/9/23</a:t>
             </a:fld>
             <a:endParaRPr lang="en-US"/>
           </a:p>
@@ -2667,7 +2768,7 @@
           <a:p>
             <a:fld id="{1EEB1225-B413-9941-B6FE-722B9F1A3838}" type="datetime1">
               <a:rPr lang="zh-CN" altLang="en-US" smtClean="0"/>
-              <a:t>2026/2/4</a:t>
+              <a:t>2026/9/23</a:t>
             </a:fld>
             <a:endParaRPr lang="en-US"/>
           </a:p>
@@ -3086,7 +3187,7 @@
           <a:p>
             <a:fld id="{3E24F182-DE75-D141-B72A-8599E29248A5}" type="datetime1">
               <a:rPr lang="zh-CN" altLang="en-US" smtClean="0"/>
-              <a:t>2026/2/4</a:t>
+              <a:t>2026/9/23</a:t>
             </a:fld>
             <a:endParaRPr lang="en-US"/>
           </a:p>
@@ -3207,7 +3308,7 @@
           <a:p>
             <a:fld id="{8E8C2D7A-8A1B-DA48-9B0B-0DEE102746F0}" type="datetime1">
               <a:rPr lang="zh-CN" altLang="en-US" smtClean="0"/>
-              <a:t>2026/2/4</a:t>
+              <a:t>2026/9/23</a:t>
             </a:fld>
             <a:endParaRPr lang="en-US"/>
           </a:p>
@@ -3298,7 +3399,7 @@
           <a:p>
             <a:fld id="{4153C787-59C9-0445-8F38-642A8469076F}" type="datetime1">
               <a:rPr lang="zh-CN" altLang="en-US" smtClean="0"/>
-              <a:t>2026/2/4</a:t>
+              <a:t>2026/9/23</a:t>
             </a:fld>
             <a:endParaRPr lang="en-US"/>
           </a:p>
@@ -3569,7 +3670,7 @@
           <a:p>
             <a:fld id="{44D50209-807A-E542-A52E-D898C2D2B27F}" type="datetime1">
               <a:rPr lang="zh-CN" altLang="en-US" smtClean="0"/>
-              <a:t>2026/2/4</a:t>
+              <a:t>2026/9/23</a:t>
             </a:fld>
             <a:endParaRPr lang="en-US"/>
           </a:p>
@@ -3820,7 +3921,7 @@
           <a:p>
             <a:fld id="{4EC27158-6770-8C48-8082-76913598A291}" type="datetime1">
               <a:rPr lang="zh-CN" altLang="en-US" smtClean="0"/>
-              <a:t>2026/2/4</a:t>
+              <a:t>2026/9/23</a:t>
             </a:fld>
             <a:endParaRPr lang="en-US"/>
           </a:p>
@@ -4029,7 +4130,7 @@
           <a:p>
             <a:fld id="{6619FEBD-E571-1443-AA22-BB9E67C15179}" type="datetime1">
               <a:rPr lang="zh-CN" altLang="en-US" smtClean="0"/>
-              <a:t>2026/2/4</a:t>
+              <a:t>2026/9/23</a:t>
             </a:fld>
             <a:endParaRPr lang="en-US"/>
           </a:p>
@@ -12327,6 +12428,102 @@
   <p:cSld>
     <p:spTree>
       <p:nvGrpSpPr>
+        <p:cNvPr id="1" name="">
+          <a:extLst>
+            <a:ext uri="{FF2B5EF4-FFF2-40B4-BE49-F238E27FC236}">
+              <a16:creationId xmlns:a16="http://schemas.microsoft.com/office/drawing/2014/main" id="{3E3DAE8D-FDFA-23DF-5E9E-66397F30EAAD}"/>
+            </a:ext>
+          </a:extLst>
+        </p:cNvPr>
+        <p:cNvGrpSpPr/>
+        <p:nvPr/>
+      </p:nvGrpSpPr>
+      <p:grpSpPr>
+        <a:xfrm>
+          <a:off x="0" y="0"/>
+          <a:ext cx="0" cy="0"/>
+          <a:chOff x="0" y="0"/>
+          <a:chExt cx="0" cy="0"/>
+        </a:xfrm>
+      </p:grpSpPr>
+      <mc:AlternateContent xmlns:mc="http://schemas.openxmlformats.org/markup-compatibility/2006">
+        <mc:Choice xmlns:we="http://schemas.microsoft.com/office/webextensions/webextension/2010/11" xmlns:pca="http://schemas.microsoft.com/office/powerpoint/2013/contentapp" Requires="we pca">
+          <p:graphicFrame>
+            <p:nvGraphicFramePr>
+              <p:cNvPr id="4" name="Add-in 3">
+                <a:extLst>
+                  <a:ext uri="{FF2B5EF4-FFF2-40B4-BE49-F238E27FC236}">
+                    <a16:creationId xmlns:a16="http://schemas.microsoft.com/office/drawing/2014/main" id="{55AEAF36-4352-3589-7B3F-CDAF13325A82}"/>
+                  </a:ext>
+                </a:extLst>
+              </p:cNvPr>
+              <p:cNvGraphicFramePr>
+                <a:graphicFrameLocks noGrp="1"/>
+              </p:cNvGraphicFramePr>
+              <p:nvPr/>
+            </p:nvGraphicFramePr>
+            <p:xfrm>
+              <a:off x="0" y="0"/>
+              <a:ext cx="9024730" cy="6665843"/>
+            </p:xfrm>
+            <a:graphic>
+              <a:graphicData uri="http://schemas.microsoft.com/office/webextensions/webextension/2010/11">
+                <we:webextensionref xmlns:we="http://schemas.microsoft.com/office/webextensions/webextension/2010/11" xmlns:r="http://schemas.openxmlformats.org/officeDocument/2006/relationships" r:id="rId3"/>
+              </a:graphicData>
+            </a:graphic>
+          </p:graphicFrame>
+        </mc:Choice>
+        <mc:Fallback>
+          <p:pic>
+            <p:nvPicPr>
+              <p:cNvPr id="4" name="Add-in 3">
+                <a:extLst>
+                  <a:ext uri="{FF2B5EF4-FFF2-40B4-BE49-F238E27FC236}">
+                    <a16:creationId xmlns:a16="http://schemas.microsoft.com/office/drawing/2014/main" id="{55AEAF36-4352-3589-7B3F-CDAF13325A82}"/>
+                  </a:ext>
+                </a:extLst>
+              </p:cNvPr>
+              <p:cNvPicPr>
+                <a:picLocks noGrp="1" noRot="1" noChangeAspect="1" noMove="1" noResize="1" noEditPoints="1" noAdjustHandles="1" noChangeArrowheads="1" noChangeShapeType="1"/>
+              </p:cNvPicPr>
+              <p:nvPr/>
+            </p:nvPicPr>
+            <p:blipFill>
+              <a:blip r:embed="rId4"/>
+              <a:stretch>
+                <a:fillRect/>
+              </a:stretch>
+            </p:blipFill>
+            <p:spPr>
+              <a:xfrm>
+                <a:off x="0" y="0"/>
+                <a:ext cx="9024730" cy="6665843"/>
+              </a:xfrm>
+              <a:prstGeom prst="rect">
+                <a:avLst/>
+              </a:prstGeom>
+            </p:spPr>
+          </p:pic>
+        </mc:Fallback>
+      </mc:AlternateContent>
+    </p:spTree>
+    <p:extLst>
+      <p:ext uri="{BB962C8B-B14F-4D97-AF65-F5344CB8AC3E}">
+        <p14:creationId xmlns:p14="http://schemas.microsoft.com/office/powerpoint/2010/main" val="3303816073"/>
+      </p:ext>
+    </p:extLst>
+  </p:cSld>
+  <p:clrMapOvr>
+    <a:masterClrMapping/>
+  </p:clrMapOvr>
+</p:sld>
+</file>
+
+<file path=ppt/slides/slide16.xml><?xml version="1.0" encoding="utf-8"?>
+<p:sld xmlns:a="http://schemas.openxmlformats.org/drawingml/2006/main" xmlns:r="http://schemas.openxmlformats.org/officeDocument/2006/relationships" xmlns:p="http://schemas.openxmlformats.org/presentationml/2006/main">
+  <p:cSld>
+    <p:spTree>
+      <p:nvGrpSpPr>
         <p:cNvPr id="1" name=""/>
         <p:cNvGrpSpPr/>
         <p:nvPr/>
@@ -14749,7 +14946,7 @@
 </p:sld>
 </file>
 
-<file path=ppt/slides/slide16.xml><?xml version="1.0" encoding="utf-8"?>
+<file path=ppt/slides/slide17.xml><?xml version="1.0" encoding="utf-8"?>
 <p:sld xmlns:a="http://schemas.openxmlformats.org/drawingml/2006/main" xmlns:r="http://schemas.openxmlformats.org/officeDocument/2006/relationships" xmlns:p="http://schemas.openxmlformats.org/presentationml/2006/main" show="0">
   <p:cSld>
     <p:spTree>
@@ -16607,7 +16804,7 @@
 </p:sld>
 </file>
 
-<file path=ppt/slides/slide17.xml><?xml version="1.0" encoding="utf-8"?>
+<file path=ppt/slides/slide18.xml><?xml version="1.0" encoding="utf-8"?>
 <p:sld xmlns:a="http://schemas.openxmlformats.org/drawingml/2006/main" xmlns:r="http://schemas.openxmlformats.org/officeDocument/2006/relationships" xmlns:p="http://schemas.openxmlformats.org/presentationml/2006/main">
   <p:cSld>
     <p:spTree>
@@ -17665,7 +17862,7 @@
 </p:sld>
 </file>
 
-<file path=ppt/slides/slide18.xml><?xml version="1.0" encoding="utf-8"?>
+<file path=ppt/slides/slide19.xml><?xml version="1.0" encoding="utf-8"?>
 <p:sld xmlns:a="http://schemas.openxmlformats.org/drawingml/2006/main" xmlns:r="http://schemas.openxmlformats.org/officeDocument/2006/relationships" xmlns:p="http://schemas.openxmlformats.org/presentationml/2006/main">
   <p:cSld>
     <p:spTree>
@@ -18938,7 +19135,142 @@
 </p:sld>
 </file>
 
-<file path=ppt/slides/slide19.xml><?xml version="1.0" encoding="utf-8"?>
+<file path=ppt/slides/slide2.xml><?xml version="1.0" encoding="utf-8"?>
+<p:sld xmlns:a="http://schemas.openxmlformats.org/drawingml/2006/main" xmlns:r="http://schemas.openxmlformats.org/officeDocument/2006/relationships" xmlns:p="http://schemas.openxmlformats.org/presentationml/2006/main">
+  <p:cSld>
+    <p:spTree>
+      <p:nvGrpSpPr>
+        <p:cNvPr id="1" name=""/>
+        <p:cNvGrpSpPr/>
+        <p:nvPr/>
+      </p:nvGrpSpPr>
+      <p:grpSpPr>
+        <a:xfrm>
+          <a:off x="0" y="0"/>
+          <a:ext cx="0" cy="0"/>
+          <a:chOff x="0" y="0"/>
+          <a:chExt cx="0" cy="0"/>
+        </a:xfrm>
+      </p:grpSpPr>
+      <p:sp>
+        <p:nvSpPr>
+          <p:cNvPr id="4" name="Title 3">
+            <a:extLst>
+              <a:ext uri="{FF2B5EF4-FFF2-40B4-BE49-F238E27FC236}">
+                <a16:creationId xmlns:a16="http://schemas.microsoft.com/office/drawing/2014/main" id="{A0F8ECD8-5413-4750-8EE7-99A92DCAB5FA}"/>
+              </a:ext>
+            </a:extLst>
+          </p:cNvPr>
+          <p:cNvSpPr>
+            <a:spLocks noGrp="1"/>
+          </p:cNvSpPr>
+          <p:nvPr>
+            <p:ph type="title"/>
+          </p:nvPr>
+        </p:nvSpPr>
+        <p:spPr/>
+        <p:txBody>
+          <a:bodyPr/>
+          <a:lstStyle/>
+          <a:p>
+            <a:r>
+              <a:rPr lang="en-US" dirty="0"/>
+              <a:t>What we’ve learnt in last lecture</a:t>
+            </a:r>
+          </a:p>
+        </p:txBody>
+      </p:sp>
+      <p:sp>
+        <p:nvSpPr>
+          <p:cNvPr id="5" name="Content Placeholder 4">
+            <a:extLst>
+              <a:ext uri="{FF2B5EF4-FFF2-40B4-BE49-F238E27FC236}">
+                <a16:creationId xmlns:a16="http://schemas.microsoft.com/office/drawing/2014/main" id="{FBAEB162-C03E-43D2-85C6-98938B5A4110}"/>
+              </a:ext>
+            </a:extLst>
+          </p:cNvPr>
+          <p:cNvSpPr>
+            <a:spLocks noGrp="1"/>
+          </p:cNvSpPr>
+          <p:nvPr>
+            <p:ph idx="1"/>
+          </p:nvPr>
+        </p:nvSpPr>
+        <p:spPr>
+          <a:xfrm>
+            <a:off x="457199" y="1600200"/>
+            <a:ext cx="8487747" cy="4525963"/>
+          </a:xfrm>
+        </p:spPr>
+        <p:txBody>
+          <a:bodyPr/>
+          <a:lstStyle/>
+          <a:p>
+            <a:r>
+              <a:rPr lang="en-US" dirty="0"/>
+              <a:t>C program’s basic organization</a:t>
+            </a:r>
+          </a:p>
+          <a:p>
+            <a:pPr lvl="1"/>
+            <a:r>
+              <a:rPr lang="en-US" dirty="0"/>
+              <a:t>*.c vs. *.h files</a:t>
+            </a:r>
+          </a:p>
+          <a:p>
+            <a:pPr lvl="1"/>
+            <a:r>
+              <a:rPr lang="en-US" dirty="0"/>
+              <a:t>Compilation workflow and make</a:t>
+            </a:r>
+          </a:p>
+          <a:p>
+            <a:r>
+              <a:rPr lang="en-US" dirty="0"/>
+              <a:t>Bitwise operators, &amp;, |, ~, ^, &gt;&gt;, &lt;&lt;</a:t>
+            </a:r>
+          </a:p>
+          <a:p>
+            <a:pPr lvl="1"/>
+            <a:r>
+              <a:rPr lang="en-US" dirty="0"/>
+              <a:t>&gt;&gt; (arithmetic vs. logical)</a:t>
+            </a:r>
+          </a:p>
+          <a:p>
+            <a:r>
+              <a:rPr lang="en-US" dirty="0"/>
+              <a:t>Control flow</a:t>
+            </a:r>
+          </a:p>
+          <a:p>
+            <a:pPr lvl="1"/>
+            <a:r>
+              <a:rPr lang="en-US" dirty="0" err="1"/>
+              <a:t>goto</a:t>
+            </a:r>
+            <a:r>
+              <a:rPr lang="en-US" dirty="0"/>
+              <a:t> is general, but results in spaghetti code</a:t>
+            </a:r>
+          </a:p>
+        </p:txBody>
+      </p:sp>
+    </p:spTree>
+    <p:extLst>
+      <p:ext uri="{BB962C8B-B14F-4D97-AF65-F5344CB8AC3E}">
+        <p14:creationId xmlns:p14="http://schemas.microsoft.com/office/powerpoint/2010/main" val="3657704657"/>
+      </p:ext>
+    </p:extLst>
+  </p:cSld>
+  <p:clrMapOvr>
+    <a:masterClrMapping/>
+  </p:clrMapOvr>
+</p:sld>
+</file>
+
+<file path=ppt/slides/slide20.xml><?xml version="1.0" encoding="utf-8"?>
 <p:sld xmlns:a="http://schemas.openxmlformats.org/drawingml/2006/main" xmlns:r="http://schemas.openxmlformats.org/officeDocument/2006/relationships" xmlns:p="http://schemas.openxmlformats.org/presentationml/2006/main">
   <p:cSld>
     <p:spTree>
@@ -20317,142 +20649,7 @@
 </p:sld>
 </file>
 
-<file path=ppt/slides/slide2.xml><?xml version="1.0" encoding="utf-8"?>
-<p:sld xmlns:a="http://schemas.openxmlformats.org/drawingml/2006/main" xmlns:r="http://schemas.openxmlformats.org/officeDocument/2006/relationships" xmlns:p="http://schemas.openxmlformats.org/presentationml/2006/main">
-  <p:cSld>
-    <p:spTree>
-      <p:nvGrpSpPr>
-        <p:cNvPr id="1" name=""/>
-        <p:cNvGrpSpPr/>
-        <p:nvPr/>
-      </p:nvGrpSpPr>
-      <p:grpSpPr>
-        <a:xfrm>
-          <a:off x="0" y="0"/>
-          <a:ext cx="0" cy="0"/>
-          <a:chOff x="0" y="0"/>
-          <a:chExt cx="0" cy="0"/>
-        </a:xfrm>
-      </p:grpSpPr>
-      <p:sp>
-        <p:nvSpPr>
-          <p:cNvPr id="4" name="Title 3">
-            <a:extLst>
-              <a:ext uri="{FF2B5EF4-FFF2-40B4-BE49-F238E27FC236}">
-                <a16:creationId xmlns:a16="http://schemas.microsoft.com/office/drawing/2014/main" id="{A0F8ECD8-5413-4750-8EE7-99A92DCAB5FA}"/>
-              </a:ext>
-            </a:extLst>
-          </p:cNvPr>
-          <p:cNvSpPr>
-            <a:spLocks noGrp="1"/>
-          </p:cNvSpPr>
-          <p:nvPr>
-            <p:ph type="title"/>
-          </p:nvPr>
-        </p:nvSpPr>
-        <p:spPr/>
-        <p:txBody>
-          <a:bodyPr/>
-          <a:lstStyle/>
-          <a:p>
-            <a:r>
-              <a:rPr lang="en-US" dirty="0"/>
-              <a:t>What we’ve learnt in last lecture</a:t>
-            </a:r>
-          </a:p>
-        </p:txBody>
-      </p:sp>
-      <p:sp>
-        <p:nvSpPr>
-          <p:cNvPr id="5" name="Content Placeholder 4">
-            <a:extLst>
-              <a:ext uri="{FF2B5EF4-FFF2-40B4-BE49-F238E27FC236}">
-                <a16:creationId xmlns:a16="http://schemas.microsoft.com/office/drawing/2014/main" id="{FBAEB162-C03E-43D2-85C6-98938B5A4110}"/>
-              </a:ext>
-            </a:extLst>
-          </p:cNvPr>
-          <p:cNvSpPr>
-            <a:spLocks noGrp="1"/>
-          </p:cNvSpPr>
-          <p:nvPr>
-            <p:ph idx="1"/>
-          </p:nvPr>
-        </p:nvSpPr>
-        <p:spPr>
-          <a:xfrm>
-            <a:off x="457199" y="1600200"/>
-            <a:ext cx="8487747" cy="4525963"/>
-          </a:xfrm>
-        </p:spPr>
-        <p:txBody>
-          <a:bodyPr/>
-          <a:lstStyle/>
-          <a:p>
-            <a:r>
-              <a:rPr lang="en-US" dirty="0"/>
-              <a:t>C program’s basic organization</a:t>
-            </a:r>
-          </a:p>
-          <a:p>
-            <a:pPr lvl="1"/>
-            <a:r>
-              <a:rPr lang="en-US" dirty="0"/>
-              <a:t>*.c vs. *.h files</a:t>
-            </a:r>
-          </a:p>
-          <a:p>
-            <a:pPr lvl="1"/>
-            <a:r>
-              <a:rPr lang="en-US" dirty="0"/>
-              <a:t>Compilation workflow and make</a:t>
-            </a:r>
-          </a:p>
-          <a:p>
-            <a:r>
-              <a:rPr lang="en-US" dirty="0"/>
-              <a:t>Bitwise operators, &amp;, |, ~, ^, &gt;&gt;, &lt;&lt;</a:t>
-            </a:r>
-          </a:p>
-          <a:p>
-            <a:pPr lvl="1"/>
-            <a:r>
-              <a:rPr lang="en-US" dirty="0"/>
-              <a:t>&gt;&gt; (arithmetic vs. logical)</a:t>
-            </a:r>
-          </a:p>
-          <a:p>
-            <a:r>
-              <a:rPr lang="en-US" dirty="0"/>
-              <a:t>Control flow</a:t>
-            </a:r>
-          </a:p>
-          <a:p>
-            <a:pPr lvl="1"/>
-            <a:r>
-              <a:rPr lang="en-US" dirty="0" err="1"/>
-              <a:t>goto</a:t>
-            </a:r>
-            <a:r>
-              <a:rPr lang="en-US" dirty="0"/>
-              <a:t> is general, but results in spaghetti code</a:t>
-            </a:r>
-          </a:p>
-        </p:txBody>
-      </p:sp>
-    </p:spTree>
-    <p:extLst>
-      <p:ext uri="{BB962C8B-B14F-4D97-AF65-F5344CB8AC3E}">
-        <p14:creationId xmlns:p14="http://schemas.microsoft.com/office/powerpoint/2010/main" val="3657704657"/>
-      </p:ext>
-    </p:extLst>
-  </p:cSld>
-  <p:clrMapOvr>
-    <a:masterClrMapping/>
-  </p:clrMapOvr>
-</p:sld>
-</file>
-
-<file path=ppt/slides/slide20.xml><?xml version="1.0" encoding="utf-8"?>
+<file path=ppt/slides/slide21.xml><?xml version="1.0" encoding="utf-8"?>
 <p:sld xmlns:a="http://schemas.openxmlformats.org/drawingml/2006/main" xmlns:r="http://schemas.openxmlformats.org/officeDocument/2006/relationships" xmlns:p="http://schemas.openxmlformats.org/presentationml/2006/main">
   <p:cSld>
     <p:spTree>
@@ -21922,7 +22119,7 @@
 </p:sld>
 </file>
 
-<file path=ppt/slides/slide21.xml><?xml version="1.0" encoding="utf-8"?>
+<file path=ppt/slides/slide22.xml><?xml version="1.0" encoding="utf-8"?>
 <p:sld xmlns:a="http://schemas.openxmlformats.org/drawingml/2006/main" xmlns:r="http://schemas.openxmlformats.org/officeDocument/2006/relationships" xmlns:p="http://schemas.openxmlformats.org/presentationml/2006/main">
   <p:cSld>
     <p:spTree>
@@ -23410,7 +23607,7 @@
 </p:sld>
 </file>
 
-<file path=ppt/slides/slide22.xml><?xml version="1.0" encoding="utf-8"?>
+<file path=ppt/slides/slide23.xml><?xml version="1.0" encoding="utf-8"?>
 <p:sld xmlns:a="http://schemas.openxmlformats.org/drawingml/2006/main" xmlns:r="http://schemas.openxmlformats.org/officeDocument/2006/relationships" xmlns:p="http://schemas.openxmlformats.org/presentationml/2006/main">
   <p:cSld>
     <p:spTree>
@@ -24907,7 +25104,7 @@
 </p:sld>
 </file>
 
-<file path=ppt/slides/slide23.xml><?xml version="1.0" encoding="utf-8"?>
+<file path=ppt/slides/slide24.xml><?xml version="1.0" encoding="utf-8"?>
 <p:sld xmlns:a="http://schemas.openxmlformats.org/drawingml/2006/main" xmlns:r="http://schemas.openxmlformats.org/officeDocument/2006/relationships" xmlns:p="http://schemas.openxmlformats.org/presentationml/2006/main">
   <p:cSld>
     <p:spTree>
@@ -26417,7 +26614,7 @@
 </p:sld>
 </file>
 
-<file path=ppt/slides/slide24.xml><?xml version="1.0" encoding="utf-8"?>
+<file path=ppt/slides/slide25.xml><?xml version="1.0" encoding="utf-8"?>
 <p:sld xmlns:a="http://schemas.openxmlformats.org/drawingml/2006/main" xmlns:r="http://schemas.openxmlformats.org/officeDocument/2006/relationships" xmlns:p="http://schemas.openxmlformats.org/presentationml/2006/main">
   <p:cSld>
     <p:spTree>
@@ -26498,7 +26695,7 @@
 </p:sld>
 </file>
 
-<file path=ppt/slides/slide25.xml><?xml version="1.0" encoding="utf-8"?>
+<file path=ppt/slides/slide26.xml><?xml version="1.0" encoding="utf-8"?>
 <p:sld xmlns:a="http://schemas.openxmlformats.org/drawingml/2006/main" xmlns:r="http://schemas.openxmlformats.org/officeDocument/2006/relationships" xmlns:p="http://schemas.openxmlformats.org/presentationml/2006/main">
   <p:cSld>
     <p:spTree>
@@ -27827,7 +28024,7 @@
 </p:sld>
 </file>
 
-<file path=ppt/slides/slide26.xml><?xml version="1.0" encoding="utf-8"?>
+<file path=ppt/slides/slide27.xml><?xml version="1.0" encoding="utf-8"?>
 <p:sld xmlns:a="http://schemas.openxmlformats.org/drawingml/2006/main" xmlns:r="http://schemas.openxmlformats.org/officeDocument/2006/relationships" xmlns:p="http://schemas.openxmlformats.org/presentationml/2006/main">
   <p:cSld>
     <p:spTree>
@@ -30496,7 +30693,7 @@
 </p:sld>
 </file>
 
-<file path=ppt/slides/slide27.xml><?xml version="1.0" encoding="utf-8"?>
+<file path=ppt/slides/slide28.xml><?xml version="1.0" encoding="utf-8"?>
 <p:sld xmlns:a="http://schemas.openxmlformats.org/drawingml/2006/main" xmlns:r="http://schemas.openxmlformats.org/officeDocument/2006/relationships" xmlns:p="http://schemas.openxmlformats.org/presentationml/2006/main">
   <p:cSld>
     <p:spTree>
@@ -32453,7 +32650,7 @@
 </p:sld>
 </file>
 
-<file path=ppt/slides/slide28.xml><?xml version="1.0" encoding="utf-8"?>
+<file path=ppt/slides/slide29.xml><?xml version="1.0" encoding="utf-8"?>
 <p:sld xmlns:a="http://schemas.openxmlformats.org/drawingml/2006/main" xmlns:r="http://schemas.openxmlformats.org/officeDocument/2006/relationships" xmlns:p="http://schemas.openxmlformats.org/presentationml/2006/main">
   <p:cSld>
     <p:spTree>
@@ -33873,7 +34070,410 @@
 </p:sld>
 </file>
 
-<file path=ppt/slides/slide29.xml><?xml version="1.0" encoding="utf-8"?>
+<file path=ppt/slides/slide3.xml><?xml version="1.0" encoding="utf-8"?>
+<p:sld xmlns:a="http://schemas.openxmlformats.org/drawingml/2006/main" xmlns:r="http://schemas.openxmlformats.org/officeDocument/2006/relationships" xmlns:p="http://schemas.openxmlformats.org/presentationml/2006/main" show="0">
+  <p:cSld>
+    <p:spTree>
+      <p:nvGrpSpPr>
+        <p:cNvPr id="1" name=""/>
+        <p:cNvGrpSpPr/>
+        <p:nvPr/>
+      </p:nvGrpSpPr>
+      <p:grpSpPr>
+        <a:xfrm>
+          <a:off x="0" y="0"/>
+          <a:ext cx="0" cy="0"/>
+          <a:chOff x="0" y="0"/>
+          <a:chExt cx="0" cy="0"/>
+        </a:xfrm>
+      </p:grpSpPr>
+      <p:sp>
+        <p:nvSpPr>
+          <p:cNvPr id="2" name="Title 1">
+            <a:extLst>
+              <a:ext uri="{FF2B5EF4-FFF2-40B4-BE49-F238E27FC236}">
+                <a16:creationId xmlns:a16="http://schemas.microsoft.com/office/drawing/2014/main" id="{8D77D7A7-C5B9-BFDF-30B4-D3138E5B437D}"/>
+              </a:ext>
+            </a:extLst>
+          </p:cNvPr>
+          <p:cNvSpPr>
+            <a:spLocks noGrp="1"/>
+          </p:cNvSpPr>
+          <p:nvPr>
+            <p:ph type="title"/>
+          </p:nvPr>
+        </p:nvSpPr>
+        <p:spPr>
+          <a:xfrm>
+            <a:off x="364435" y="19878"/>
+            <a:ext cx="8229600" cy="1143000"/>
+          </a:xfrm>
+        </p:spPr>
+        <p:txBody>
+          <a:bodyPr/>
+          <a:lstStyle/>
+          <a:p>
+            <a:r>
+              <a:rPr lang="en-US" dirty="0"/>
+              <a:t>C scope rules</a:t>
+            </a:r>
+          </a:p>
+        </p:txBody>
+      </p:sp>
+      <p:sp>
+        <p:nvSpPr>
+          <p:cNvPr id="3" name="Content Placeholder 2">
+            <a:extLst>
+              <a:ext uri="{FF2B5EF4-FFF2-40B4-BE49-F238E27FC236}">
+                <a16:creationId xmlns:a16="http://schemas.microsoft.com/office/drawing/2014/main" id="{40038585-B9A5-D70A-6AAD-86B89F6E0FA0}"/>
+              </a:ext>
+            </a:extLst>
+          </p:cNvPr>
+          <p:cNvSpPr>
+            <a:spLocks noGrp="1"/>
+          </p:cNvSpPr>
+          <p:nvPr>
+            <p:ph idx="1"/>
+          </p:nvPr>
+        </p:nvSpPr>
+        <p:spPr>
+          <a:xfrm>
+            <a:off x="457200" y="1162878"/>
+            <a:ext cx="8229600" cy="2136913"/>
+          </a:xfrm>
+        </p:spPr>
+        <p:txBody>
+          <a:bodyPr>
+            <a:normAutofit/>
+          </a:bodyPr>
+          <a:lstStyle/>
+          <a:p>
+            <a:r>
+              <a:rPr lang="en-US" dirty="0">
+                <a:latin typeface="Calibri" panose="020F0502020204030204" pitchFamily="34" charset="0"/>
+                <a:cs typeface="Calibri" panose="020F0502020204030204" pitchFamily="34" charset="0"/>
+              </a:rPr>
+              <a:t>Local variable: defined within a procedure</a:t>
+            </a:r>
+          </a:p>
+          <a:p>
+            <a:pPr lvl="1"/>
+            <a:r>
+              <a:rPr lang="en-US" dirty="0">
+                <a:latin typeface="Calibri" panose="020F0502020204030204" pitchFamily="34" charset="0"/>
+                <a:cs typeface="Calibri" panose="020F0502020204030204" pitchFamily="34" charset="0"/>
+              </a:rPr>
+              <a:t>Scope: within the procedure</a:t>
+            </a:r>
+          </a:p>
+          <a:p>
+            <a:r>
+              <a:rPr lang="en-US" dirty="0">
+                <a:latin typeface="Calibri" panose="020F0502020204030204" pitchFamily="34" charset="0"/>
+                <a:cs typeface="Calibri" panose="020F0502020204030204" pitchFamily="34" charset="0"/>
+              </a:rPr>
+              <a:t>Global variable: defined outside of any procedure</a:t>
+            </a:r>
+          </a:p>
+          <a:p>
+            <a:pPr lvl="1"/>
+            <a:r>
+              <a:rPr lang="en-US" dirty="0">
+                <a:latin typeface="Calibri" panose="020F0502020204030204" pitchFamily="34" charset="0"/>
+                <a:cs typeface="Calibri" panose="020F0502020204030204" pitchFamily="34" charset="0"/>
+              </a:rPr>
+              <a:t>Scope: within the file unless exported via *.h</a:t>
+            </a:r>
+          </a:p>
+        </p:txBody>
+      </p:sp>
+      <p:sp>
+        <p:nvSpPr>
+          <p:cNvPr id="4" name="TextBox 3">
+            <a:extLst>
+              <a:ext uri="{FF2B5EF4-FFF2-40B4-BE49-F238E27FC236}">
+                <a16:creationId xmlns:a16="http://schemas.microsoft.com/office/drawing/2014/main" id="{11A26EE3-E125-A1FB-E368-5BB497B14104}"/>
+              </a:ext>
+            </a:extLst>
+          </p:cNvPr>
+          <p:cNvSpPr txBox="1"/>
+          <p:nvPr/>
+        </p:nvSpPr>
+        <p:spPr>
+          <a:xfrm>
+            <a:off x="675863" y="3151429"/>
+            <a:ext cx="4108173" cy="2862322"/>
+          </a:xfrm>
+          <a:prstGeom prst="rect">
+            <a:avLst/>
+          </a:prstGeom>
+          <a:solidFill>
+            <a:schemeClr val="accent2">
+              <a:lumMod val="40000"/>
+              <a:lumOff val="60000"/>
+            </a:schemeClr>
+          </a:solidFill>
+        </p:spPr>
+        <p:txBody>
+          <a:bodyPr wrap="square" rtlCol="0">
+            <a:spAutoFit/>
+          </a:bodyPr>
+          <a:lstStyle/>
+          <a:p>
+            <a:r>
+              <a:rPr lang="en-US" dirty="0">
+                <a:latin typeface="Consolas" panose="020B0609020204030204" pitchFamily="49" charset="0"/>
+                <a:cs typeface="Consolas" panose="020B0609020204030204" pitchFamily="49" charset="0"/>
+              </a:rPr>
+              <a:t>int x = 0;</a:t>
+            </a:r>
+          </a:p>
+          <a:p>
+            <a:r>
+              <a:rPr lang="en-US" dirty="0">
+                <a:latin typeface="Consolas" panose="020B0609020204030204" pitchFamily="49" charset="0"/>
+                <a:cs typeface="Consolas" panose="020B0609020204030204" pitchFamily="49" charset="0"/>
+              </a:rPr>
+              <a:t>int y = 1;</a:t>
+            </a:r>
+          </a:p>
+          <a:p>
+            <a:r>
+              <a:rPr lang="en-US" dirty="0">
+                <a:latin typeface="Consolas" panose="020B0609020204030204" pitchFamily="49" charset="0"/>
+                <a:cs typeface="Consolas" panose="020B0609020204030204" pitchFamily="49" charset="0"/>
+              </a:rPr>
+              <a:t>void swap(int x, int y) {</a:t>
+            </a:r>
+          </a:p>
+          <a:p>
+            <a:r>
+              <a:rPr lang="en-US" dirty="0">
+                <a:latin typeface="Consolas" panose="020B0609020204030204" pitchFamily="49" charset="0"/>
+                <a:cs typeface="Consolas" panose="020B0609020204030204" pitchFamily="49" charset="0"/>
+              </a:rPr>
+              <a:t>   int </a:t>
+            </a:r>
+            <a:r>
+              <a:rPr lang="en-US" dirty="0" err="1">
+                <a:latin typeface="Consolas" panose="020B0609020204030204" pitchFamily="49" charset="0"/>
+                <a:cs typeface="Consolas" panose="020B0609020204030204" pitchFamily="49" charset="0"/>
+              </a:rPr>
+              <a:t>tmp</a:t>
+            </a:r>
+            <a:r>
+              <a:rPr lang="en-US" dirty="0">
+                <a:latin typeface="Consolas" panose="020B0609020204030204" pitchFamily="49" charset="0"/>
+                <a:cs typeface="Consolas" panose="020B0609020204030204" pitchFamily="49" charset="0"/>
+              </a:rPr>
+              <a:t> = x;</a:t>
+            </a:r>
+          </a:p>
+          <a:p>
+            <a:r>
+              <a:rPr lang="en-US" dirty="0">
+                <a:latin typeface="Consolas" panose="020B0609020204030204" pitchFamily="49" charset="0"/>
+                <a:cs typeface="Consolas" panose="020B0609020204030204" pitchFamily="49" charset="0"/>
+              </a:rPr>
+              <a:t>   x = y;</a:t>
+            </a:r>
+          </a:p>
+          <a:p>
+            <a:r>
+              <a:rPr lang="en-US" dirty="0">
+                <a:latin typeface="Consolas" panose="020B0609020204030204" pitchFamily="49" charset="0"/>
+                <a:cs typeface="Consolas" panose="020B0609020204030204" pitchFamily="49" charset="0"/>
+              </a:rPr>
+              <a:t>   y= x;</a:t>
+            </a:r>
+          </a:p>
+          <a:p>
+            <a:r>
+              <a:rPr lang="en-US" dirty="0">
+                <a:latin typeface="Consolas" panose="020B0609020204030204" pitchFamily="49" charset="0"/>
+                <a:cs typeface="Consolas" panose="020B0609020204030204" pitchFamily="49" charset="0"/>
+              </a:rPr>
+              <a:t>}</a:t>
+            </a:r>
+          </a:p>
+          <a:p>
+            <a:r>
+              <a:rPr lang="en-US" dirty="0">
+                <a:latin typeface="Consolas" panose="020B0609020204030204" pitchFamily="49" charset="0"/>
+                <a:cs typeface="Consolas" panose="020B0609020204030204" pitchFamily="49" charset="0"/>
+              </a:rPr>
+              <a:t>int main() {</a:t>
+            </a:r>
+          </a:p>
+          <a:p>
+            <a:r>
+              <a:rPr lang="en-US" dirty="0">
+                <a:latin typeface="Consolas" panose="020B0609020204030204" pitchFamily="49" charset="0"/>
+                <a:cs typeface="Consolas" panose="020B0609020204030204" pitchFamily="49" charset="0"/>
+              </a:rPr>
+              <a:t>  swap(x, y);</a:t>
+            </a:r>
+          </a:p>
+          <a:p>
+            <a:r>
+              <a:rPr lang="en-US" dirty="0">
+                <a:latin typeface="Consolas" panose="020B0609020204030204" pitchFamily="49" charset="0"/>
+                <a:cs typeface="Consolas" panose="020B0609020204030204" pitchFamily="49" charset="0"/>
+              </a:rPr>
+              <a:t>}</a:t>
+            </a:r>
+          </a:p>
+        </p:txBody>
+      </p:sp>
+      <p:sp>
+        <p:nvSpPr>
+          <p:cNvPr id="5" name="TextBox 4">
+            <a:extLst>
+              <a:ext uri="{FF2B5EF4-FFF2-40B4-BE49-F238E27FC236}">
+                <a16:creationId xmlns:a16="http://schemas.microsoft.com/office/drawing/2014/main" id="{795772AC-6BE5-6ED0-F73B-D5842A4B9271}"/>
+              </a:ext>
+            </a:extLst>
+          </p:cNvPr>
+          <p:cNvSpPr txBox="1"/>
+          <p:nvPr/>
+        </p:nvSpPr>
+        <p:spPr>
+          <a:xfrm>
+            <a:off x="2063578" y="6178378"/>
+            <a:ext cx="4498347" cy="369332"/>
+          </a:xfrm>
+          <a:prstGeom prst="rect">
+            <a:avLst/>
+          </a:prstGeom>
+          <a:noFill/>
+          <a:ln>
+            <a:noFill/>
+          </a:ln>
+        </p:spPr>
+        <p:txBody>
+          <a:bodyPr wrap="none" rtlCol="0">
+            <a:spAutoFit/>
+          </a:bodyPr>
+          <a:lstStyle/>
+          <a:p>
+            <a:r>
+              <a:rPr lang="en-US" dirty="0">
+                <a:solidFill>
+                  <a:srgbClr val="0000FF"/>
+                </a:solidFill>
+                <a:latin typeface="Comic Sans MS" panose="030F0902030302020204" pitchFamily="66" charset="0"/>
+              </a:rPr>
+              <a:t>Function arguments are passed-by-value</a:t>
+            </a:r>
+          </a:p>
+        </p:txBody>
+      </p:sp>
+      <p:sp>
+        <p:nvSpPr>
+          <p:cNvPr id="6" name="Freeform 5">
+            <a:extLst>
+              <a:ext uri="{FF2B5EF4-FFF2-40B4-BE49-F238E27FC236}">
+                <a16:creationId xmlns:a16="http://schemas.microsoft.com/office/drawing/2014/main" id="{C8A28B37-F04B-37AC-72BF-36AB0ADC54AD}"/>
+              </a:ext>
+            </a:extLst>
+          </p:cNvPr>
+          <p:cNvSpPr/>
+          <p:nvPr/>
+        </p:nvSpPr>
+        <p:spPr>
+          <a:xfrm>
+            <a:off x="1923196" y="5659395"/>
+            <a:ext cx="634653" cy="494270"/>
+          </a:xfrm>
+          <a:custGeom>
+            <a:avLst/>
+            <a:gdLst>
+              <a:gd name="csX0" fmla="*/ 634653 w 634653"/>
+              <a:gd name="csY0" fmla="*/ 494270 h 494270"/>
+              <a:gd name="csX1" fmla="*/ 78599 w 634653"/>
+              <a:gd name="csY1" fmla="*/ 358346 h 494270"/>
+              <a:gd name="csX2" fmla="*/ 16815 w 634653"/>
+              <a:gd name="csY2" fmla="*/ 0 h 494270"/>
+            </a:gdLst>
+            <a:ahLst/>
+            <a:cxnLst>
+              <a:cxn ang="0">
+                <a:pos x="csX0" y="csY0"/>
+              </a:cxn>
+              <a:cxn ang="0">
+                <a:pos x="csX1" y="csY1"/>
+              </a:cxn>
+              <a:cxn ang="0">
+                <a:pos x="csX2" y="csY2"/>
+              </a:cxn>
+            </a:cxnLst>
+            <a:rect l="l" t="t" r="r" b="b"/>
+            <a:pathLst>
+              <a:path w="634653" h="494270">
+                <a:moveTo>
+                  <a:pt x="634653" y="494270"/>
+                </a:moveTo>
+                <a:cubicBezTo>
+                  <a:pt x="408112" y="467497"/>
+                  <a:pt x="181572" y="440724"/>
+                  <a:pt x="78599" y="358346"/>
+                </a:cubicBezTo>
+                <a:cubicBezTo>
+                  <a:pt x="-24374" y="275968"/>
+                  <a:pt x="-3780" y="137984"/>
+                  <a:pt x="16815" y="0"/>
+                </a:cubicBezTo>
+              </a:path>
+            </a:pathLst>
+          </a:custGeom>
+          <a:noFill/>
+          <a:ln w="28575">
+            <a:solidFill>
+              <a:srgbClr val="0000FF"/>
+            </a:solidFill>
+            <a:headEnd type="none" w="med" len="med"/>
+            <a:tailEnd type="arrow" w="med" len="med"/>
+          </a:ln>
+        </p:spPr>
+        <p:style>
+          <a:lnRef idx="2">
+            <a:schemeClr val="accent1">
+              <a:shade val="50000"/>
+            </a:schemeClr>
+          </a:lnRef>
+          <a:fillRef idx="1">
+            <a:schemeClr val="accent1"/>
+          </a:fillRef>
+          <a:effectRef idx="0">
+            <a:schemeClr val="accent1"/>
+          </a:effectRef>
+          <a:fontRef idx="minor">
+            <a:schemeClr val="lt1"/>
+          </a:fontRef>
+        </p:style>
+        <p:txBody>
+          <a:bodyPr rtlCol="0" anchor="ctr"/>
+          <a:lstStyle/>
+          <a:p>
+            <a:pPr algn="ctr"/>
+            <a:endParaRPr lang="en-US"/>
+          </a:p>
+        </p:txBody>
+      </p:sp>
+    </p:spTree>
+    <p:extLst>
+      <p:ext uri="{BB962C8B-B14F-4D97-AF65-F5344CB8AC3E}">
+        <p14:creationId xmlns:p14="http://schemas.microsoft.com/office/powerpoint/2010/main" val="409588062"/>
+      </p:ext>
+    </p:extLst>
+  </p:cSld>
+  <p:clrMapOvr>
+    <a:masterClrMapping/>
+  </p:clrMapOvr>
+</p:sld>
+</file>
+
+<file path=ppt/slides/slide30.xml><?xml version="1.0" encoding="utf-8"?>
 <p:sld xmlns:a="http://schemas.openxmlformats.org/drawingml/2006/main" xmlns:r="http://schemas.openxmlformats.org/officeDocument/2006/relationships" xmlns:p="http://schemas.openxmlformats.org/presentationml/2006/main">
   <p:cSld>
     <p:spTree>
@@ -35620,410 +36220,7 @@
 </p:sld>
 </file>
 
-<file path=ppt/slides/slide3.xml><?xml version="1.0" encoding="utf-8"?>
-<p:sld xmlns:a="http://schemas.openxmlformats.org/drawingml/2006/main" xmlns:r="http://schemas.openxmlformats.org/officeDocument/2006/relationships" xmlns:p="http://schemas.openxmlformats.org/presentationml/2006/main">
-  <p:cSld>
-    <p:spTree>
-      <p:nvGrpSpPr>
-        <p:cNvPr id="1" name=""/>
-        <p:cNvGrpSpPr/>
-        <p:nvPr/>
-      </p:nvGrpSpPr>
-      <p:grpSpPr>
-        <a:xfrm>
-          <a:off x="0" y="0"/>
-          <a:ext cx="0" cy="0"/>
-          <a:chOff x="0" y="0"/>
-          <a:chExt cx="0" cy="0"/>
-        </a:xfrm>
-      </p:grpSpPr>
-      <p:sp>
-        <p:nvSpPr>
-          <p:cNvPr id="2" name="Title 1">
-            <a:extLst>
-              <a:ext uri="{FF2B5EF4-FFF2-40B4-BE49-F238E27FC236}">
-                <a16:creationId xmlns:a16="http://schemas.microsoft.com/office/drawing/2014/main" id="{8D77D7A7-C5B9-BFDF-30B4-D3138E5B437D}"/>
-              </a:ext>
-            </a:extLst>
-          </p:cNvPr>
-          <p:cNvSpPr>
-            <a:spLocks noGrp="1"/>
-          </p:cNvSpPr>
-          <p:nvPr>
-            <p:ph type="title"/>
-          </p:nvPr>
-        </p:nvSpPr>
-        <p:spPr>
-          <a:xfrm>
-            <a:off x="364435" y="19878"/>
-            <a:ext cx="8229600" cy="1143000"/>
-          </a:xfrm>
-        </p:spPr>
-        <p:txBody>
-          <a:bodyPr/>
-          <a:lstStyle/>
-          <a:p>
-            <a:r>
-              <a:rPr lang="en-US" dirty="0"/>
-              <a:t>C scope rules</a:t>
-            </a:r>
-          </a:p>
-        </p:txBody>
-      </p:sp>
-      <p:sp>
-        <p:nvSpPr>
-          <p:cNvPr id="3" name="Content Placeholder 2">
-            <a:extLst>
-              <a:ext uri="{FF2B5EF4-FFF2-40B4-BE49-F238E27FC236}">
-                <a16:creationId xmlns:a16="http://schemas.microsoft.com/office/drawing/2014/main" id="{40038585-B9A5-D70A-6AAD-86B89F6E0FA0}"/>
-              </a:ext>
-            </a:extLst>
-          </p:cNvPr>
-          <p:cNvSpPr>
-            <a:spLocks noGrp="1"/>
-          </p:cNvSpPr>
-          <p:nvPr>
-            <p:ph idx="1"/>
-          </p:nvPr>
-        </p:nvSpPr>
-        <p:spPr>
-          <a:xfrm>
-            <a:off x="457200" y="1162878"/>
-            <a:ext cx="8229600" cy="2136913"/>
-          </a:xfrm>
-        </p:spPr>
-        <p:txBody>
-          <a:bodyPr>
-            <a:normAutofit/>
-          </a:bodyPr>
-          <a:lstStyle/>
-          <a:p>
-            <a:r>
-              <a:rPr lang="en-US" dirty="0">
-                <a:latin typeface="Calibri" panose="020F0502020204030204" pitchFamily="34" charset="0"/>
-                <a:cs typeface="Calibri" panose="020F0502020204030204" pitchFamily="34" charset="0"/>
-              </a:rPr>
-              <a:t>Local variable: defined within a procedure</a:t>
-            </a:r>
-          </a:p>
-          <a:p>
-            <a:pPr lvl="1"/>
-            <a:r>
-              <a:rPr lang="en-US" dirty="0">
-                <a:latin typeface="Calibri" panose="020F0502020204030204" pitchFamily="34" charset="0"/>
-                <a:cs typeface="Calibri" panose="020F0502020204030204" pitchFamily="34" charset="0"/>
-              </a:rPr>
-              <a:t>Scope: within the procedure</a:t>
-            </a:r>
-          </a:p>
-          <a:p>
-            <a:r>
-              <a:rPr lang="en-US" dirty="0">
-                <a:latin typeface="Calibri" panose="020F0502020204030204" pitchFamily="34" charset="0"/>
-                <a:cs typeface="Calibri" panose="020F0502020204030204" pitchFamily="34" charset="0"/>
-              </a:rPr>
-              <a:t>Global variable: defined outside of any procedure</a:t>
-            </a:r>
-          </a:p>
-          <a:p>
-            <a:pPr lvl="1"/>
-            <a:r>
-              <a:rPr lang="en-US" dirty="0">
-                <a:latin typeface="Calibri" panose="020F0502020204030204" pitchFamily="34" charset="0"/>
-                <a:cs typeface="Calibri" panose="020F0502020204030204" pitchFamily="34" charset="0"/>
-              </a:rPr>
-              <a:t>Scope: within the file unless exported via *.h</a:t>
-            </a:r>
-          </a:p>
-        </p:txBody>
-      </p:sp>
-      <p:sp>
-        <p:nvSpPr>
-          <p:cNvPr id="4" name="TextBox 3">
-            <a:extLst>
-              <a:ext uri="{FF2B5EF4-FFF2-40B4-BE49-F238E27FC236}">
-                <a16:creationId xmlns:a16="http://schemas.microsoft.com/office/drawing/2014/main" id="{11A26EE3-E125-A1FB-E368-5BB497B14104}"/>
-              </a:ext>
-            </a:extLst>
-          </p:cNvPr>
-          <p:cNvSpPr txBox="1"/>
-          <p:nvPr/>
-        </p:nvSpPr>
-        <p:spPr>
-          <a:xfrm>
-            <a:off x="675863" y="3151429"/>
-            <a:ext cx="4108173" cy="2862322"/>
-          </a:xfrm>
-          <a:prstGeom prst="rect">
-            <a:avLst/>
-          </a:prstGeom>
-          <a:solidFill>
-            <a:schemeClr val="accent2">
-              <a:lumMod val="40000"/>
-              <a:lumOff val="60000"/>
-            </a:schemeClr>
-          </a:solidFill>
-        </p:spPr>
-        <p:txBody>
-          <a:bodyPr wrap="square" rtlCol="0">
-            <a:spAutoFit/>
-          </a:bodyPr>
-          <a:lstStyle/>
-          <a:p>
-            <a:r>
-              <a:rPr lang="en-US" dirty="0">
-                <a:latin typeface="Consolas" panose="020B0609020204030204" pitchFamily="49" charset="0"/>
-                <a:cs typeface="Consolas" panose="020B0609020204030204" pitchFamily="49" charset="0"/>
-              </a:rPr>
-              <a:t>int x = 0;</a:t>
-            </a:r>
-          </a:p>
-          <a:p>
-            <a:r>
-              <a:rPr lang="en-US" dirty="0">
-                <a:latin typeface="Consolas" panose="020B0609020204030204" pitchFamily="49" charset="0"/>
-                <a:cs typeface="Consolas" panose="020B0609020204030204" pitchFamily="49" charset="0"/>
-              </a:rPr>
-              <a:t>int y = 1;</a:t>
-            </a:r>
-          </a:p>
-          <a:p>
-            <a:r>
-              <a:rPr lang="en-US" dirty="0">
-                <a:latin typeface="Consolas" panose="020B0609020204030204" pitchFamily="49" charset="0"/>
-                <a:cs typeface="Consolas" panose="020B0609020204030204" pitchFamily="49" charset="0"/>
-              </a:rPr>
-              <a:t>void swap(int x, int y) {</a:t>
-            </a:r>
-          </a:p>
-          <a:p>
-            <a:r>
-              <a:rPr lang="en-US" dirty="0">
-                <a:latin typeface="Consolas" panose="020B0609020204030204" pitchFamily="49" charset="0"/>
-                <a:cs typeface="Consolas" panose="020B0609020204030204" pitchFamily="49" charset="0"/>
-              </a:rPr>
-              <a:t>   int </a:t>
-            </a:r>
-            <a:r>
-              <a:rPr lang="en-US" dirty="0" err="1">
-                <a:latin typeface="Consolas" panose="020B0609020204030204" pitchFamily="49" charset="0"/>
-                <a:cs typeface="Consolas" panose="020B0609020204030204" pitchFamily="49" charset="0"/>
-              </a:rPr>
-              <a:t>tmp</a:t>
-            </a:r>
-            <a:r>
-              <a:rPr lang="en-US" dirty="0">
-                <a:latin typeface="Consolas" panose="020B0609020204030204" pitchFamily="49" charset="0"/>
-                <a:cs typeface="Consolas" panose="020B0609020204030204" pitchFamily="49" charset="0"/>
-              </a:rPr>
-              <a:t> = x;</a:t>
-            </a:r>
-          </a:p>
-          <a:p>
-            <a:r>
-              <a:rPr lang="en-US" dirty="0">
-                <a:latin typeface="Consolas" panose="020B0609020204030204" pitchFamily="49" charset="0"/>
-                <a:cs typeface="Consolas" panose="020B0609020204030204" pitchFamily="49" charset="0"/>
-              </a:rPr>
-              <a:t>   x = y;</a:t>
-            </a:r>
-          </a:p>
-          <a:p>
-            <a:r>
-              <a:rPr lang="en-US" dirty="0">
-                <a:latin typeface="Consolas" panose="020B0609020204030204" pitchFamily="49" charset="0"/>
-                <a:cs typeface="Consolas" panose="020B0609020204030204" pitchFamily="49" charset="0"/>
-              </a:rPr>
-              <a:t>   y= x;</a:t>
-            </a:r>
-          </a:p>
-          <a:p>
-            <a:r>
-              <a:rPr lang="en-US" dirty="0">
-                <a:latin typeface="Consolas" panose="020B0609020204030204" pitchFamily="49" charset="0"/>
-                <a:cs typeface="Consolas" panose="020B0609020204030204" pitchFamily="49" charset="0"/>
-              </a:rPr>
-              <a:t>}</a:t>
-            </a:r>
-          </a:p>
-          <a:p>
-            <a:r>
-              <a:rPr lang="en-US" dirty="0">
-                <a:latin typeface="Consolas" panose="020B0609020204030204" pitchFamily="49" charset="0"/>
-                <a:cs typeface="Consolas" panose="020B0609020204030204" pitchFamily="49" charset="0"/>
-              </a:rPr>
-              <a:t>int main() {</a:t>
-            </a:r>
-          </a:p>
-          <a:p>
-            <a:r>
-              <a:rPr lang="en-US" dirty="0">
-                <a:latin typeface="Consolas" panose="020B0609020204030204" pitchFamily="49" charset="0"/>
-                <a:cs typeface="Consolas" panose="020B0609020204030204" pitchFamily="49" charset="0"/>
-              </a:rPr>
-              <a:t>  swap(x, y);</a:t>
-            </a:r>
-          </a:p>
-          <a:p>
-            <a:r>
-              <a:rPr lang="en-US" dirty="0">
-                <a:latin typeface="Consolas" panose="020B0609020204030204" pitchFamily="49" charset="0"/>
-                <a:cs typeface="Consolas" panose="020B0609020204030204" pitchFamily="49" charset="0"/>
-              </a:rPr>
-              <a:t>}</a:t>
-            </a:r>
-          </a:p>
-        </p:txBody>
-      </p:sp>
-      <p:sp>
-        <p:nvSpPr>
-          <p:cNvPr id="5" name="TextBox 4">
-            <a:extLst>
-              <a:ext uri="{FF2B5EF4-FFF2-40B4-BE49-F238E27FC236}">
-                <a16:creationId xmlns:a16="http://schemas.microsoft.com/office/drawing/2014/main" id="{795772AC-6BE5-6ED0-F73B-D5842A4B9271}"/>
-              </a:ext>
-            </a:extLst>
-          </p:cNvPr>
-          <p:cNvSpPr txBox="1"/>
-          <p:nvPr/>
-        </p:nvSpPr>
-        <p:spPr>
-          <a:xfrm>
-            <a:off x="2063578" y="6178378"/>
-            <a:ext cx="4498347" cy="369332"/>
-          </a:xfrm>
-          <a:prstGeom prst="rect">
-            <a:avLst/>
-          </a:prstGeom>
-          <a:noFill/>
-          <a:ln>
-            <a:noFill/>
-          </a:ln>
-        </p:spPr>
-        <p:txBody>
-          <a:bodyPr wrap="none" rtlCol="0">
-            <a:spAutoFit/>
-          </a:bodyPr>
-          <a:lstStyle/>
-          <a:p>
-            <a:r>
-              <a:rPr lang="en-US" dirty="0">
-                <a:solidFill>
-                  <a:srgbClr val="0000FF"/>
-                </a:solidFill>
-                <a:latin typeface="Comic Sans MS" panose="030F0902030302020204" pitchFamily="66" charset="0"/>
-              </a:rPr>
-              <a:t>Function arguments are passed-by-value</a:t>
-            </a:r>
-          </a:p>
-        </p:txBody>
-      </p:sp>
-      <p:sp>
-        <p:nvSpPr>
-          <p:cNvPr id="6" name="Freeform 5">
-            <a:extLst>
-              <a:ext uri="{FF2B5EF4-FFF2-40B4-BE49-F238E27FC236}">
-                <a16:creationId xmlns:a16="http://schemas.microsoft.com/office/drawing/2014/main" id="{C8A28B37-F04B-37AC-72BF-36AB0ADC54AD}"/>
-              </a:ext>
-            </a:extLst>
-          </p:cNvPr>
-          <p:cNvSpPr/>
-          <p:nvPr/>
-        </p:nvSpPr>
-        <p:spPr>
-          <a:xfrm>
-            <a:off x="1923196" y="5659395"/>
-            <a:ext cx="634653" cy="494270"/>
-          </a:xfrm>
-          <a:custGeom>
-            <a:avLst/>
-            <a:gdLst>
-              <a:gd name="csX0" fmla="*/ 634653 w 634653"/>
-              <a:gd name="csY0" fmla="*/ 494270 h 494270"/>
-              <a:gd name="csX1" fmla="*/ 78599 w 634653"/>
-              <a:gd name="csY1" fmla="*/ 358346 h 494270"/>
-              <a:gd name="csX2" fmla="*/ 16815 w 634653"/>
-              <a:gd name="csY2" fmla="*/ 0 h 494270"/>
-            </a:gdLst>
-            <a:ahLst/>
-            <a:cxnLst>
-              <a:cxn ang="0">
-                <a:pos x="csX0" y="csY0"/>
-              </a:cxn>
-              <a:cxn ang="0">
-                <a:pos x="csX1" y="csY1"/>
-              </a:cxn>
-              <a:cxn ang="0">
-                <a:pos x="csX2" y="csY2"/>
-              </a:cxn>
-            </a:cxnLst>
-            <a:rect l="l" t="t" r="r" b="b"/>
-            <a:pathLst>
-              <a:path w="634653" h="494270">
-                <a:moveTo>
-                  <a:pt x="634653" y="494270"/>
-                </a:moveTo>
-                <a:cubicBezTo>
-                  <a:pt x="408112" y="467497"/>
-                  <a:pt x="181572" y="440724"/>
-                  <a:pt x="78599" y="358346"/>
-                </a:cubicBezTo>
-                <a:cubicBezTo>
-                  <a:pt x="-24374" y="275968"/>
-                  <a:pt x="-3780" y="137984"/>
-                  <a:pt x="16815" y="0"/>
-                </a:cubicBezTo>
-              </a:path>
-            </a:pathLst>
-          </a:custGeom>
-          <a:noFill/>
-          <a:ln w="28575">
-            <a:solidFill>
-              <a:srgbClr val="0000FF"/>
-            </a:solidFill>
-            <a:headEnd type="none" w="med" len="med"/>
-            <a:tailEnd type="arrow" w="med" len="med"/>
-          </a:ln>
-        </p:spPr>
-        <p:style>
-          <a:lnRef idx="2">
-            <a:schemeClr val="accent1">
-              <a:shade val="50000"/>
-            </a:schemeClr>
-          </a:lnRef>
-          <a:fillRef idx="1">
-            <a:schemeClr val="accent1"/>
-          </a:fillRef>
-          <a:effectRef idx="0">
-            <a:schemeClr val="accent1"/>
-          </a:effectRef>
-          <a:fontRef idx="minor">
-            <a:schemeClr val="lt1"/>
-          </a:fontRef>
-        </p:style>
-        <p:txBody>
-          <a:bodyPr rtlCol="0" anchor="ctr"/>
-          <a:lstStyle/>
-          <a:p>
-            <a:pPr algn="ctr"/>
-            <a:endParaRPr lang="en-US"/>
-          </a:p>
-        </p:txBody>
-      </p:sp>
-    </p:spTree>
-    <p:extLst>
-      <p:ext uri="{BB962C8B-B14F-4D97-AF65-F5344CB8AC3E}">
-        <p14:creationId xmlns:p14="http://schemas.microsoft.com/office/powerpoint/2010/main" val="409588062"/>
-      </p:ext>
-    </p:extLst>
-  </p:cSld>
-  <p:clrMapOvr>
-    <a:masterClrMapping/>
-  </p:clrMapOvr>
-</p:sld>
-</file>
-
-<file path=ppt/slides/slide30.xml><?xml version="1.0" encoding="utf-8"?>
+<file path=ppt/slides/slide31.xml><?xml version="1.0" encoding="utf-8"?>
 <p:sld xmlns:a="http://schemas.openxmlformats.org/drawingml/2006/main" xmlns:r="http://schemas.openxmlformats.org/officeDocument/2006/relationships" xmlns:p="http://schemas.openxmlformats.org/presentationml/2006/main">
   <p:cSld>
     <p:spTree>
@@ -37332,7 +37529,7 @@
 </p:sld>
 </file>
 
-<file path=ppt/slides/slide31.xml><?xml version="1.0" encoding="utf-8"?>
+<file path=ppt/slides/slide32.xml><?xml version="1.0" encoding="utf-8"?>
 <p:sld xmlns:a="http://schemas.openxmlformats.org/drawingml/2006/main" xmlns:r="http://schemas.openxmlformats.org/officeDocument/2006/relationships" xmlns:p="http://schemas.openxmlformats.org/presentationml/2006/main" show="0">
   <p:cSld>
     <p:spTree>
@@ -37638,7 +37835,7 @@
 </p:sld>
 </file>
 
-<file path=ppt/slides/slide32.xml><?xml version="1.0" encoding="utf-8"?>
+<file path=ppt/slides/slide33.xml><?xml version="1.0" encoding="utf-8"?>
 <p:sld xmlns:a="http://schemas.openxmlformats.org/drawingml/2006/main" xmlns:r="http://schemas.openxmlformats.org/officeDocument/2006/relationships" xmlns:p="http://schemas.openxmlformats.org/presentationml/2006/main">
   <p:cSld>
     <p:spTree>
@@ -38231,7 +38428,7 @@
 </p:sld>
 </file>
 
-<file path=ppt/slides/slide33.xml><?xml version="1.0" encoding="utf-8"?>
+<file path=ppt/slides/slide34.xml><?xml version="1.0" encoding="utf-8"?>
 <p:sld xmlns:a="http://schemas.openxmlformats.org/drawingml/2006/main" xmlns:r="http://schemas.openxmlformats.org/officeDocument/2006/relationships" xmlns:p="http://schemas.openxmlformats.org/presentationml/2006/main">
   <p:cSld>
     <p:spTree>
@@ -38906,7 +39103,7 @@
 </p:sld>
 </file>
 
-<file path=ppt/slides/slide34.xml><?xml version="1.0" encoding="utf-8"?>
+<file path=ppt/slides/slide35.xml><?xml version="1.0" encoding="utf-8"?>
 <p:sld xmlns:a="http://schemas.openxmlformats.org/drawingml/2006/main" xmlns:r="http://schemas.openxmlformats.org/officeDocument/2006/relationships" xmlns:p="http://schemas.openxmlformats.org/presentationml/2006/main">
   <p:cSld>
     <p:spTree>
@@ -40352,7 +40549,7 @@
 </p:sld>
 </file>
 
-<file path=ppt/slides/slide35.xml><?xml version="1.0" encoding="utf-8"?>
+<file path=ppt/slides/slide36.xml><?xml version="1.0" encoding="utf-8"?>
 <p:sld xmlns:a="http://schemas.openxmlformats.org/drawingml/2006/main" xmlns:r="http://schemas.openxmlformats.org/officeDocument/2006/relationships" xmlns:p="http://schemas.openxmlformats.org/presentationml/2006/main">
   <p:cSld>
     <p:spTree>
@@ -41076,7 +41273,7 @@
 </p:sld>
 </file>
 
-<file path=ppt/slides/slide36.xml><?xml version="1.0" encoding="utf-8"?>
+<file path=ppt/slides/slide37.xml><?xml version="1.0" encoding="utf-8"?>
 <p:sld xmlns:a="http://schemas.openxmlformats.org/drawingml/2006/main" xmlns:r="http://schemas.openxmlformats.org/officeDocument/2006/relationships" xmlns:p="http://schemas.openxmlformats.org/presentationml/2006/main">
   <p:cSld>
     <p:spTree>
@@ -41415,7 +41612,12 @@
             <p:ph type="subTitle" idx="1"/>
           </p:nvPr>
         </p:nvSpPr>
-        <p:spPr/>
+        <p:spPr>
+          <a:xfrm>
+            <a:off x="1371600" y="3265714"/>
+            <a:ext cx="6400800" cy="1752600"/>
+          </a:xfrm>
+        </p:spPr>
         <p:txBody>
           <a:bodyPr/>
           <a:lstStyle/>
@@ -49947,4 +50149,18 @@
   </a:objectDefaults>
   <a:extraClrSchemeLst/>
 </a:theme>
+</file>
+
+<file path=ppt/webextensions/webextension1.xml><?xml version="1.0" encoding="utf-8"?>
+<we:webextension xmlns:we="http://schemas.microsoft.com/office/webextensions/webextension/2010/11" id="{EE71CA13-C252-464D-A4FC-965E6354B79E}">
+  <we:reference id="wa104218073" version="3.0.0.1" store="en-US" storeType="OMEX"/>
+  <we:alternateReferences>
+    <we:reference id="WA104218073" version="3.0.0.1" store="WA104218073" storeType="OMEX"/>
+  </we:alternateReferences>
+  <we:properties>
+    <we:property name="appSlideData" value="{&quot;slideId&quot;:1097,&quot;confidenceLevel&quot;:2}"/>
+  </we:properties>
+  <we:bindings/>
+  <we:snapshot xmlns:r="http://schemas.openxmlformats.org/officeDocument/2006/relationships" r:embed="rId1"/>
+</we:webextension>
 </file>